--- a/docs/00_ブライダル業界/03_基本設計書/説明資料/AIブライダルプランニング支援システム_概要と機能紹介.pptx
+++ b/docs/00_ブライダル業界/03_基本設計書/説明資料/AIブライダルプランニング支援システム_概要と機能紹介.pptx
@@ -2409,6 +2409,10 @@
           </a:solidFill>
           <a:ln/>
         </p:spPr>
+        <p:txBody>
+          <a:bodyPr/>
+          <a:p/>
+        </p:txBody>
       </p:sp>
       <p:sp>
         <p:nvSpPr>
@@ -2431,6 +2435,10 @@
           </a:solidFill>
           <a:ln/>
         </p:spPr>
+        <p:txBody>
+          <a:bodyPr/>
+          <a:p/>
+        </p:txBody>
       </p:sp>
       <p:sp>
         <p:nvSpPr>
@@ -2451,6 +2459,10 @@
           </a:solidFill>
           <a:ln/>
         </p:spPr>
+        <p:txBody>
+          <a:bodyPr/>
+          <a:p/>
+        </p:txBody>
       </p:sp>
       <p:pic>
         <p:nvPicPr>
@@ -2579,6 +2591,10 @@
             <a:prstDash val="solid"/>
           </a:ln>
         </p:spPr>
+        <p:txBody>
+          <a:bodyPr/>
+          <a:p/>
+        </p:txBody>
       </p:sp>
       <p:sp>
         <p:nvSpPr>
@@ -2709,6 +2725,10 @@
           </a:solidFill>
           <a:ln/>
         </p:spPr>
+        <p:txBody>
+          <a:bodyPr/>
+          <a:p/>
+        </p:txBody>
       </p:sp>
       <p:pic>
         <p:nvPicPr>
@@ -2794,6 +2814,10 @@
           </a:solidFill>
           <a:ln/>
         </p:spPr>
+        <p:txBody>
+          <a:bodyPr/>
+          <a:p/>
+        </p:txBody>
       </p:sp>
       <p:sp>
         <p:nvSpPr>
@@ -2906,6 +2930,10 @@
             </a:outerShdw>
           </a:effectLst>
         </p:spPr>
+        <p:txBody>
+          <a:bodyPr/>
+          <a:p/>
+        </p:txBody>
       </p:sp>
       <p:sp>
         <p:nvSpPr>
@@ -3115,6 +3143,10 @@
           </a:solidFill>
           <a:ln/>
         </p:spPr>
+        <p:txBody>
+          <a:bodyPr/>
+          <a:p/>
+        </p:txBody>
       </p:sp>
       <p:pic>
         <p:nvPicPr>
@@ -3200,6 +3232,10 @@
           </a:solidFill>
           <a:ln/>
         </p:spPr>
+        <p:txBody>
+          <a:bodyPr/>
+          <a:p/>
+        </p:txBody>
       </p:sp>
       <p:sp>
         <p:nvSpPr>
@@ -3312,6 +3348,10 @@
             </a:outerShdw>
           </a:effectLst>
         </p:spPr>
+        <p:txBody>
+          <a:bodyPr/>
+          <a:p/>
+        </p:txBody>
       </p:sp>
       <p:sp>
         <p:nvSpPr>
@@ -3521,6 +3561,10 @@
           </a:solidFill>
           <a:ln/>
         </p:spPr>
+        <p:txBody>
+          <a:bodyPr/>
+          <a:p/>
+        </p:txBody>
       </p:sp>
       <p:pic>
         <p:nvPicPr>
@@ -3579,7 +3623,7 @@
                 <a:ea typeface="BIZ UDPMincho" pitchFamily="34" charset="-122"/>
                 <a:cs typeface="BIZ UDPMincho" pitchFamily="34" charset="-120"/>
               </a:rPr>
-              <a:t>Claude APIが24時間、プランの叩き台を作る</a:t>
+              <a:t>Gemini APIが24時間、プランの叩き台を作る</a:t>
             </a:r>
             <a:endParaRPr lang="en-US" sz="2700" dirty="0"/>
           </a:p>
@@ -3606,6 +3650,10 @@
           </a:solidFill>
           <a:ln/>
         </p:spPr>
+        <p:txBody>
+          <a:bodyPr/>
+          <a:p/>
+        </p:txBody>
       </p:sp>
       <p:sp>
         <p:nvSpPr>
@@ -3718,6 +3766,10 @@
             </a:outerShdw>
           </a:effectLst>
         </p:spPr>
+        <p:txBody>
+          <a:bodyPr/>
+          <a:p/>
+        </p:txBody>
       </p:sp>
       <p:sp>
         <p:nvSpPr>
@@ -3927,6 +3979,10 @@
           </a:solidFill>
           <a:ln/>
         </p:spPr>
+        <p:txBody>
+          <a:bodyPr/>
+          <a:p/>
+        </p:txBody>
       </p:sp>
       <p:pic>
         <p:nvPicPr>
@@ -4012,6 +4068,10 @@
           </a:solidFill>
           <a:ln/>
         </p:spPr>
+        <p:txBody>
+          <a:bodyPr/>
+          <a:p/>
+        </p:txBody>
       </p:sp>
       <p:sp>
         <p:nvSpPr>
@@ -4124,6 +4184,10 @@
             </a:outerShdw>
           </a:effectLst>
         </p:spPr>
+        <p:txBody>
+          <a:bodyPr/>
+          <a:p/>
+        </p:txBody>
       </p:sp>
       <p:sp>
         <p:nvSpPr>
@@ -4333,6 +4397,10 @@
           </a:solidFill>
           <a:ln/>
         </p:spPr>
+        <p:txBody>
+          <a:bodyPr/>
+          <a:p/>
+        </p:txBody>
       </p:sp>
       <p:pic>
         <p:nvPicPr>
@@ -4418,6 +4486,10 @@
           </a:solidFill>
           <a:ln/>
         </p:spPr>
+        <p:txBody>
+          <a:bodyPr/>
+          <a:p/>
+        </p:txBody>
       </p:sp>
       <p:sp>
         <p:nvSpPr>
@@ -4530,6 +4602,10 @@
             </a:outerShdw>
           </a:effectLst>
         </p:spPr>
+        <p:txBody>
+          <a:bodyPr/>
+          <a:p/>
+        </p:txBody>
       </p:sp>
       <p:sp>
         <p:nvSpPr>
@@ -4619,7 +4695,7 @@
                 <a:ea typeface="BIZ UDPGothic" pitchFamily="34" charset="-122"/>
                 <a:cs typeface="BIZ UDPGothic" pitchFamily="34" charset="-120"/>
               </a:rPr>
-              <a:t>添付ファイルはAWS S3に保存し、URLで参照</a:t>
+              <a:t>添付ファイルは保存先フォルダに保存し、場所（パス）で参照</a:t>
             </a:r>
             <a:endParaRPr lang="en-US" sz="1900" dirty="0"/>
           </a:p>
@@ -4739,6 +4815,10 @@
           </a:solidFill>
           <a:ln/>
         </p:spPr>
+        <p:txBody>
+          <a:bodyPr/>
+          <a:p/>
+        </p:txBody>
       </p:sp>
       <p:pic>
         <p:nvPicPr>
@@ -4824,6 +4904,10 @@
           </a:solidFill>
           <a:ln/>
         </p:spPr>
+        <p:txBody>
+          <a:bodyPr/>
+          <a:p/>
+        </p:txBody>
       </p:sp>
       <p:sp>
         <p:nvSpPr>
@@ -4936,6 +5020,10 @@
             </a:outerShdw>
           </a:effectLst>
         </p:spPr>
+        <p:txBody>
+          <a:bodyPr/>
+          <a:p/>
+        </p:txBody>
       </p:sp>
       <p:sp>
         <p:nvSpPr>
@@ -5145,6 +5233,10 @@
           </a:solidFill>
           <a:ln/>
         </p:spPr>
+        <p:txBody>
+          <a:bodyPr/>
+          <a:p/>
+        </p:txBody>
       </p:sp>
       <p:pic>
         <p:nvPicPr>
@@ -5230,6 +5322,10 @@
           </a:solidFill>
           <a:ln/>
         </p:spPr>
+        <p:txBody>
+          <a:bodyPr/>
+          <a:p/>
+        </p:txBody>
       </p:sp>
       <p:sp>
         <p:nvSpPr>
@@ -5342,6 +5438,10 @@
             </a:outerShdw>
           </a:effectLst>
         </p:spPr>
+        <p:txBody>
+          <a:bodyPr/>
+          <a:p/>
+        </p:txBody>
       </p:sp>
       <p:sp>
         <p:nvSpPr>
@@ -5527,6 +5627,10 @@
           </a:solidFill>
           <a:ln/>
         </p:spPr>
+        <p:txBody>
+          <a:bodyPr/>
+          <a:p/>
+        </p:txBody>
       </p:sp>
       <p:pic>
         <p:nvPicPr>
@@ -5612,6 +5716,10 @@
           </a:solidFill>
           <a:ln/>
         </p:spPr>
+        <p:txBody>
+          <a:bodyPr/>
+          <a:p/>
+        </p:txBody>
       </p:sp>
       <p:sp>
         <p:nvSpPr>
@@ -5724,6 +5832,10 @@
             </a:outerShdw>
           </a:effectLst>
         </p:spPr>
+        <p:txBody>
+          <a:bodyPr/>
+          <a:p/>
+        </p:txBody>
       </p:sp>
       <p:sp>
         <p:nvSpPr>
@@ -5911,6 +6023,10 @@
           </a:solidFill>
           <a:ln/>
         </p:spPr>
+        <p:txBody>
+          <a:bodyPr/>
+          <a:p/>
+        </p:txBody>
       </p:sp>
       <p:sp>
         <p:nvSpPr>
@@ -5933,6 +6049,10 @@
           </a:solidFill>
           <a:ln/>
         </p:spPr>
+        <p:txBody>
+          <a:bodyPr/>
+          <a:p/>
+        </p:txBody>
       </p:sp>
       <p:sp>
         <p:nvSpPr>
@@ -5995,6 +6115,10 @@
           </a:solidFill>
           <a:ln/>
         </p:spPr>
+        <p:txBody>
+          <a:bodyPr/>
+          <a:p/>
+        </p:txBody>
       </p:sp>
       <p:pic>
         <p:nvPicPr>
@@ -6078,6 +6202,10 @@
           </a:solidFill>
           <a:ln/>
         </p:spPr>
+        <p:txBody>
+          <a:bodyPr/>
+          <a:p/>
+        </p:txBody>
       </p:sp>
       <p:pic>
         <p:nvPicPr>
@@ -6161,6 +6289,10 @@
           </a:solidFill>
           <a:ln/>
         </p:spPr>
+        <p:txBody>
+          <a:bodyPr/>
+          <a:p/>
+        </p:txBody>
       </p:sp>
       <p:pic>
         <p:nvPicPr>
@@ -6244,6 +6376,10 @@
           </a:solidFill>
           <a:ln/>
         </p:spPr>
+        <p:txBody>
+          <a:bodyPr/>
+          <a:p/>
+        </p:txBody>
       </p:sp>
       <p:pic>
         <p:nvPicPr>
@@ -6330,6 +6466,10 @@
             <a:prstDash val="solid"/>
           </a:ln>
         </p:spPr>
+        <p:txBody>
+          <a:bodyPr/>
+          <a:p/>
+        </p:txBody>
       </p:sp>
       <p:sp>
         <p:nvSpPr>
@@ -6460,6 +6600,10 @@
           </a:solidFill>
           <a:ln/>
         </p:spPr>
+        <p:txBody>
+          <a:bodyPr/>
+          <a:p/>
+        </p:txBody>
       </p:sp>
       <p:pic>
         <p:nvPicPr>
@@ -6557,6 +6701,10 @@
             </a:outerShdw>
           </a:effectLst>
         </p:spPr>
+        <p:txBody>
+          <a:bodyPr/>
+          <a:p/>
+        </p:txBody>
       </p:sp>
       <p:sp>
         <p:nvSpPr>
@@ -6708,6 +6856,10 @@
             </a:outerShdw>
           </a:effectLst>
         </p:spPr>
+        <p:txBody>
+          <a:bodyPr/>
+          <a:p/>
+        </p:txBody>
       </p:sp>
       <p:sp>
         <p:nvSpPr>
@@ -6859,6 +7011,10 @@
             </a:outerShdw>
           </a:effectLst>
         </p:spPr>
+        <p:txBody>
+          <a:bodyPr/>
+          <a:p/>
+        </p:txBody>
       </p:sp>
       <p:sp>
         <p:nvSpPr>
@@ -7010,6 +7166,10 @@
             </a:outerShdw>
           </a:effectLst>
         </p:spPr>
+        <p:txBody>
+          <a:bodyPr/>
+          <a:p/>
+        </p:txBody>
       </p:sp>
       <p:sp>
         <p:nvSpPr>
@@ -7218,6 +7378,10 @@
           </a:solidFill>
           <a:ln/>
         </p:spPr>
+        <p:txBody>
+          <a:bodyPr/>
+          <a:p/>
+        </p:txBody>
       </p:sp>
       <p:pic>
         <p:nvPicPr>
@@ -7315,6 +7479,10 @@
             </a:outerShdw>
           </a:effectLst>
         </p:spPr>
+        <p:txBody>
+          <a:bodyPr/>
+          <a:p/>
+        </p:txBody>
       </p:sp>
       <p:sp>
         <p:nvSpPr>
@@ -7335,6 +7503,10 @@
           </a:solidFill>
           <a:ln/>
         </p:spPr>
+        <p:txBody>
+          <a:bodyPr/>
+          <a:p/>
+        </p:txBody>
       </p:sp>
       <p:pic>
         <p:nvPicPr>
@@ -7477,6 +7649,10 @@
             </a:outerShdw>
           </a:effectLst>
         </p:spPr>
+        <p:txBody>
+          <a:bodyPr/>
+          <a:p/>
+        </p:txBody>
       </p:sp>
       <p:sp>
         <p:nvSpPr>
@@ -7497,6 +7673,10 @@
           </a:solidFill>
           <a:ln/>
         </p:spPr>
+        <p:txBody>
+          <a:bodyPr/>
+          <a:p/>
+        </p:txBody>
       </p:sp>
       <p:pic>
         <p:nvPicPr>
@@ -7639,6 +7819,10 @@
             </a:outerShdw>
           </a:effectLst>
         </p:spPr>
+        <p:txBody>
+          <a:bodyPr/>
+          <a:p/>
+        </p:txBody>
       </p:sp>
       <p:sp>
         <p:nvSpPr>
@@ -7659,6 +7843,10 @@
           </a:solidFill>
           <a:ln/>
         </p:spPr>
+        <p:txBody>
+          <a:bodyPr/>
+          <a:p/>
+        </p:txBody>
       </p:sp>
       <p:pic>
         <p:nvPicPr>
@@ -7801,6 +7989,10 @@
             </a:outerShdw>
           </a:effectLst>
         </p:spPr>
+        <p:txBody>
+          <a:bodyPr/>
+          <a:p/>
+        </p:txBody>
       </p:sp>
       <p:sp>
         <p:nvSpPr>
@@ -7821,6 +8013,10 @@
           </a:solidFill>
           <a:ln/>
         </p:spPr>
+        <p:txBody>
+          <a:bodyPr/>
+          <a:p/>
+        </p:txBody>
       </p:sp>
       <p:pic>
         <p:nvPicPr>
@@ -8020,6 +8216,10 @@
           </a:solidFill>
           <a:ln/>
         </p:spPr>
+        <p:txBody>
+          <a:bodyPr/>
+          <a:p/>
+        </p:txBody>
       </p:sp>
       <p:pic>
         <p:nvPicPr>
@@ -8117,6 +8317,10 @@
             </a:outerShdw>
           </a:effectLst>
         </p:spPr>
+        <p:txBody>
+          <a:bodyPr/>
+          <a:p/>
+        </p:txBody>
       </p:sp>
       <p:sp>
         <p:nvSpPr>
@@ -8139,6 +8343,10 @@
           </a:solidFill>
           <a:ln/>
         </p:spPr>
+        <p:txBody>
+          <a:bodyPr/>
+          <a:p/>
+        </p:txBody>
       </p:sp>
       <p:sp>
         <p:nvSpPr>
@@ -8201,6 +8409,10 @@
           </a:solidFill>
           <a:ln/>
         </p:spPr>
+        <p:txBody>
+          <a:bodyPr/>
+          <a:p/>
+        </p:txBody>
       </p:sp>
       <p:pic>
         <p:nvPicPr>
@@ -8301,6 +8513,10 @@
             </a:outerShdw>
           </a:effectLst>
         </p:spPr>
+        <p:txBody>
+          <a:bodyPr/>
+          <a:p/>
+        </p:txBody>
       </p:sp>
       <p:sp>
         <p:nvSpPr>
@@ -8323,6 +8539,10 @@
           </a:solidFill>
           <a:ln/>
         </p:spPr>
+        <p:txBody>
+          <a:bodyPr/>
+          <a:p/>
+        </p:txBody>
       </p:sp>
       <p:sp>
         <p:nvSpPr>
@@ -8385,6 +8605,10 @@
           </a:solidFill>
           <a:ln/>
         </p:spPr>
+        <p:txBody>
+          <a:bodyPr/>
+          <a:p/>
+        </p:txBody>
       </p:sp>
       <p:pic>
         <p:nvPicPr>
@@ -8485,6 +8709,10 @@
             </a:outerShdw>
           </a:effectLst>
         </p:spPr>
+        <p:txBody>
+          <a:bodyPr/>
+          <a:p/>
+        </p:txBody>
       </p:sp>
       <p:sp>
         <p:nvSpPr>
@@ -8507,6 +8735,10 @@
           </a:solidFill>
           <a:ln/>
         </p:spPr>
+        <p:txBody>
+          <a:bodyPr/>
+          <a:p/>
+        </p:txBody>
       </p:sp>
       <p:sp>
         <p:nvSpPr>
@@ -8569,6 +8801,10 @@
           </a:solidFill>
           <a:ln/>
         </p:spPr>
+        <p:txBody>
+          <a:bodyPr/>
+          <a:p/>
+        </p:txBody>
       </p:sp>
       <p:pic>
         <p:nvPicPr>
@@ -8669,6 +8905,10 @@
             </a:outerShdw>
           </a:effectLst>
         </p:spPr>
+        <p:txBody>
+          <a:bodyPr/>
+          <a:p/>
+        </p:txBody>
       </p:sp>
       <p:sp>
         <p:nvSpPr>
@@ -8691,6 +8931,10 @@
           </a:solidFill>
           <a:ln/>
         </p:spPr>
+        <p:txBody>
+          <a:bodyPr/>
+          <a:p/>
+        </p:txBody>
       </p:sp>
       <p:sp>
         <p:nvSpPr>
@@ -8753,6 +8997,10 @@
           </a:solidFill>
           <a:ln/>
         </p:spPr>
+        <p:txBody>
+          <a:bodyPr/>
+          <a:p/>
+        </p:txBody>
       </p:sp>
       <p:pic>
         <p:nvPicPr>
@@ -8910,6 +9158,10 @@
           </a:solidFill>
           <a:ln/>
         </p:spPr>
+        <p:txBody>
+          <a:bodyPr/>
+          <a:p/>
+        </p:txBody>
       </p:sp>
       <p:pic>
         <p:nvPicPr>
@@ -9007,6 +9259,10 @@
             </a:outerShdw>
           </a:effectLst>
         </p:spPr>
+        <p:txBody>
+          <a:bodyPr/>
+          <a:p/>
+        </p:txBody>
       </p:sp>
       <p:sp>
         <p:nvSpPr>
@@ -9027,6 +9283,10 @@
           </a:solidFill>
           <a:ln/>
         </p:spPr>
+        <p:txBody>
+          <a:bodyPr/>
+          <a:p/>
+        </p:txBody>
       </p:sp>
       <p:pic>
         <p:nvPicPr>
@@ -9155,6 +9415,10 @@
             <a:prstDash val="solid"/>
           </a:ln>
         </p:spPr>
+        <p:txBody>
+          <a:bodyPr/>
+          <a:p/>
+        </p:txBody>
       </p:sp>
       <p:sp>
         <p:nvSpPr>
@@ -9235,6 +9499,10 @@
             </a:outerShdw>
           </a:effectLst>
         </p:spPr>
+        <p:txBody>
+          <a:bodyPr/>
+          <a:p/>
+        </p:txBody>
       </p:sp>
       <p:sp>
         <p:nvSpPr>
@@ -9255,6 +9523,10 @@
           </a:solidFill>
           <a:ln/>
         </p:spPr>
+        <p:txBody>
+          <a:bodyPr/>
+          <a:p/>
+        </p:txBody>
       </p:sp>
       <p:pic>
         <p:nvPicPr>
@@ -9383,6 +9655,10 @@
             <a:prstDash val="solid"/>
           </a:ln>
         </p:spPr>
+        <p:txBody>
+          <a:bodyPr/>
+          <a:p/>
+        </p:txBody>
       </p:sp>
       <p:sp>
         <p:nvSpPr>
@@ -9511,6 +9787,10 @@
             </a:outerShdw>
           </a:effectLst>
         </p:spPr>
+        <p:txBody>
+          <a:bodyPr/>
+          <a:p/>
+        </p:txBody>
       </p:sp>
       <p:sp>
         <p:nvSpPr>
@@ -9531,6 +9811,10 @@
           </a:solidFill>
           <a:ln/>
         </p:spPr>
+        <p:txBody>
+          <a:bodyPr/>
+          <a:p/>
+        </p:txBody>
       </p:sp>
       <p:pic>
         <p:nvPicPr>
@@ -9659,6 +9943,10 @@
             <a:prstDash val="solid"/>
           </a:ln>
         </p:spPr>
+        <p:txBody>
+          <a:bodyPr/>
+          <a:p/>
+        </p:txBody>
       </p:sp>
       <p:sp>
         <p:nvSpPr>
@@ -9787,6 +10075,10 @@
             </a:outerShdw>
           </a:effectLst>
         </p:spPr>
+        <p:txBody>
+          <a:bodyPr/>
+          <a:p/>
+        </p:txBody>
       </p:sp>
       <p:sp>
         <p:nvSpPr>
@@ -9807,6 +10099,10 @@
           </a:solidFill>
           <a:ln/>
         </p:spPr>
+        <p:txBody>
+          <a:bodyPr/>
+          <a:p/>
+        </p:txBody>
       </p:sp>
       <p:pic>
         <p:nvPicPr>
@@ -9935,6 +10231,10 @@
             <a:prstDash val="solid"/>
           </a:ln>
         </p:spPr>
+        <p:txBody>
+          <a:bodyPr/>
+          <a:p/>
+        </p:txBody>
       </p:sp>
       <p:sp>
         <p:nvSpPr>
@@ -10096,6 +10396,10 @@
           </a:solidFill>
           <a:ln/>
         </p:spPr>
+        <p:txBody>
+          <a:bodyPr/>
+          <a:p/>
+        </p:txBody>
       </p:sp>
       <p:pic>
         <p:nvPicPr>
@@ -10193,6 +10497,10 @@
             </a:outerShdw>
           </a:effectLst>
         </p:spPr>
+        <p:txBody>
+          <a:bodyPr/>
+          <a:p/>
+        </p:txBody>
       </p:sp>
       <p:sp>
         <p:nvSpPr>
@@ -10213,6 +10521,10 @@
           </a:solidFill>
           <a:ln/>
         </p:spPr>
+        <p:txBody>
+          <a:bodyPr/>
+          <a:p/>
+        </p:txBody>
       </p:sp>
       <p:sp>
         <p:nvSpPr>
@@ -10274,6 +10586,10 @@
           </a:solidFill>
           <a:ln/>
         </p:spPr>
+        <p:txBody>
+          <a:bodyPr/>
+          <a:p/>
+        </p:txBody>
       </p:sp>
       <p:sp>
         <p:nvSpPr>
@@ -10417,6 +10733,10 @@
           </a:solidFill>
           <a:ln/>
         </p:spPr>
+        <p:txBody>
+          <a:bodyPr/>
+          <a:p/>
+        </p:txBody>
       </p:sp>
       <p:pic>
         <p:nvPicPr>
@@ -10475,6 +10795,10 @@
             </a:outerShdw>
           </a:effectLst>
         </p:spPr>
+        <p:txBody>
+          <a:bodyPr/>
+          <a:p/>
+        </p:txBody>
       </p:sp>
       <p:sp>
         <p:nvSpPr>
@@ -10495,6 +10819,10 @@
           </a:solidFill>
           <a:ln/>
         </p:spPr>
+        <p:txBody>
+          <a:bodyPr/>
+          <a:p/>
+        </p:txBody>
       </p:sp>
       <p:sp>
         <p:nvSpPr>
@@ -10556,6 +10884,10 @@
           </a:solidFill>
           <a:ln/>
         </p:spPr>
+        <p:txBody>
+          <a:bodyPr/>
+          <a:p/>
+        </p:txBody>
       </p:sp>
       <p:sp>
         <p:nvSpPr>
@@ -10699,6 +11031,10 @@
           </a:solidFill>
           <a:ln/>
         </p:spPr>
+        <p:txBody>
+          <a:bodyPr/>
+          <a:p/>
+        </p:txBody>
       </p:sp>
       <p:pic>
         <p:nvPicPr>
@@ -10757,6 +11093,10 @@
             </a:outerShdw>
           </a:effectLst>
         </p:spPr>
+        <p:txBody>
+          <a:bodyPr/>
+          <a:p/>
+        </p:txBody>
       </p:sp>
       <p:sp>
         <p:nvSpPr>
@@ -10777,6 +11117,10 @@
           </a:solidFill>
           <a:ln/>
         </p:spPr>
+        <p:txBody>
+          <a:bodyPr/>
+          <a:p/>
+        </p:txBody>
       </p:sp>
       <p:sp>
         <p:nvSpPr>
@@ -10838,6 +11182,10 @@
           </a:solidFill>
           <a:ln/>
         </p:spPr>
+        <p:txBody>
+          <a:bodyPr/>
+          <a:p/>
+        </p:txBody>
       </p:sp>
       <p:sp>
         <p:nvSpPr>
@@ -10981,6 +11329,10 @@
           </a:solidFill>
           <a:ln/>
         </p:spPr>
+        <p:txBody>
+          <a:bodyPr/>
+          <a:p/>
+        </p:txBody>
       </p:sp>
       <p:pic>
         <p:nvPicPr>
@@ -11039,6 +11391,10 @@
             </a:outerShdw>
           </a:effectLst>
         </p:spPr>
+        <p:txBody>
+          <a:bodyPr/>
+          <a:p/>
+        </p:txBody>
       </p:sp>
       <p:sp>
         <p:nvSpPr>
@@ -11059,6 +11415,10 @@
           </a:solidFill>
           <a:ln/>
         </p:spPr>
+        <p:txBody>
+          <a:bodyPr/>
+          <a:p/>
+        </p:txBody>
       </p:sp>
       <p:sp>
         <p:nvSpPr>
@@ -11120,6 +11480,10 @@
           </a:solidFill>
           <a:ln/>
         </p:spPr>
+        <p:txBody>
+          <a:bodyPr/>
+          <a:p/>
+        </p:txBody>
       </p:sp>
       <p:sp>
         <p:nvSpPr>
@@ -11263,6 +11627,10 @@
           </a:solidFill>
           <a:ln/>
         </p:spPr>
+        <p:txBody>
+          <a:bodyPr/>
+          <a:p/>
+        </p:txBody>
       </p:sp>
       <p:pic>
         <p:nvPicPr>
@@ -11321,6 +11689,10 @@
             </a:outerShdw>
           </a:effectLst>
         </p:spPr>
+        <p:txBody>
+          <a:bodyPr/>
+          <a:p/>
+        </p:txBody>
       </p:sp>
       <p:sp>
         <p:nvSpPr>
@@ -11341,6 +11713,10 @@
           </a:solidFill>
           <a:ln/>
         </p:spPr>
+        <p:txBody>
+          <a:bodyPr/>
+          <a:p/>
+        </p:txBody>
       </p:sp>
       <p:sp>
         <p:nvSpPr>
@@ -11402,6 +11778,10 @@
           </a:solidFill>
           <a:ln/>
         </p:spPr>
+        <p:txBody>
+          <a:bodyPr/>
+          <a:p/>
+        </p:txBody>
       </p:sp>
       <p:sp>
         <p:nvSpPr>
@@ -11616,6 +11996,10 @@
           </a:solidFill>
           <a:ln/>
         </p:spPr>
+        <p:txBody>
+          <a:bodyPr/>
+          <a:p/>
+        </p:txBody>
       </p:sp>
       <p:pic>
         <p:nvPicPr>
@@ -11713,6 +12097,10 @@
             </a:outerShdw>
           </a:effectLst>
         </p:spPr>
+        <p:txBody>
+          <a:bodyPr/>
+          <a:p/>
+        </p:txBody>
       </p:sp>
       <p:sp>
         <p:nvSpPr>
@@ -11733,6 +12121,10 @@
           </a:solidFill>
           <a:ln/>
         </p:spPr>
+        <p:txBody>
+          <a:bodyPr/>
+          <a:p/>
+        </p:txBody>
       </p:sp>
       <p:pic>
         <p:nvPicPr>
@@ -11908,6 +12300,10 @@
             </a:outerShdw>
           </a:effectLst>
         </p:spPr>
+        <p:txBody>
+          <a:bodyPr/>
+          <a:p/>
+        </p:txBody>
       </p:sp>
       <p:sp>
         <p:nvSpPr>
@@ -11928,6 +12324,10 @@
           </a:solidFill>
           <a:ln/>
         </p:spPr>
+        <p:txBody>
+          <a:bodyPr/>
+          <a:p/>
+        </p:txBody>
       </p:sp>
       <p:pic>
         <p:nvPicPr>
@@ -12103,6 +12503,10 @@
             </a:outerShdw>
           </a:effectLst>
         </p:spPr>
+        <p:txBody>
+          <a:bodyPr/>
+          <a:p/>
+        </p:txBody>
       </p:sp>
       <p:sp>
         <p:nvSpPr>
@@ -12123,6 +12527,10 @@
           </a:solidFill>
           <a:ln/>
         </p:spPr>
+        <p:txBody>
+          <a:bodyPr/>
+          <a:p/>
+        </p:txBody>
       </p:sp>
       <p:pic>
         <p:nvPicPr>
@@ -12298,6 +12706,10 @@
             </a:outerShdw>
           </a:effectLst>
         </p:spPr>
+        <p:txBody>
+          <a:bodyPr/>
+          <a:p/>
+        </p:txBody>
       </p:sp>
       <p:sp>
         <p:nvSpPr>
@@ -12318,6 +12730,10 @@
           </a:solidFill>
           <a:ln/>
         </p:spPr>
+        <p:txBody>
+          <a:bodyPr/>
+          <a:p/>
+        </p:txBody>
       </p:sp>
       <p:pic>
         <p:nvPicPr>
@@ -12493,6 +12909,10 @@
             </a:outerShdw>
           </a:effectLst>
         </p:spPr>
+        <p:txBody>
+          <a:bodyPr/>
+          <a:p/>
+        </p:txBody>
       </p:sp>
       <p:sp>
         <p:nvSpPr>
@@ -12513,6 +12933,10 @@
           </a:solidFill>
           <a:ln/>
         </p:spPr>
+        <p:txBody>
+          <a:bodyPr/>
+          <a:p/>
+        </p:txBody>
       </p:sp>
       <p:pic>
         <p:nvPicPr>
@@ -12688,6 +13112,10 @@
             </a:outerShdw>
           </a:effectLst>
         </p:spPr>
+        <p:txBody>
+          <a:bodyPr/>
+          <a:p/>
+        </p:txBody>
       </p:sp>
       <p:sp>
         <p:nvSpPr>
@@ -12708,6 +13136,10 @@
           </a:solidFill>
           <a:ln/>
         </p:spPr>
+        <p:txBody>
+          <a:bodyPr/>
+          <a:p/>
+        </p:txBody>
       </p:sp>
       <p:pic>
         <p:nvPicPr>
@@ -12883,6 +13315,10 @@
             </a:outerShdw>
           </a:effectLst>
         </p:spPr>
+        <p:txBody>
+          <a:bodyPr/>
+          <a:p/>
+        </p:txBody>
       </p:sp>
       <p:sp>
         <p:nvSpPr>
@@ -12903,6 +13339,10 @@
           </a:solidFill>
           <a:ln/>
         </p:spPr>
+        <p:txBody>
+          <a:bodyPr/>
+          <a:p/>
+        </p:txBody>
       </p:sp>
       <p:pic>
         <p:nvPicPr>
@@ -13078,6 +13518,10 @@
             </a:outerShdw>
           </a:effectLst>
         </p:spPr>
+        <p:txBody>
+          <a:bodyPr/>
+          <a:p/>
+        </p:txBody>
       </p:sp>
       <p:sp>
         <p:nvSpPr>
@@ -13098,6 +13542,10 @@
           </a:solidFill>
           <a:ln/>
         </p:spPr>
+        <p:txBody>
+          <a:bodyPr/>
+          <a:p/>
+        </p:txBody>
       </p:sp>
       <p:pic>
         <p:nvPicPr>
@@ -13273,6 +13721,10 @@
             </a:outerShdw>
           </a:effectLst>
         </p:spPr>
+        <p:txBody>
+          <a:bodyPr/>
+          <a:p/>
+        </p:txBody>
       </p:sp>
       <p:sp>
         <p:nvSpPr>
@@ -13293,6 +13745,10 @@
           </a:solidFill>
           <a:ln/>
         </p:spPr>
+        <p:txBody>
+          <a:bodyPr/>
+          <a:p/>
+        </p:txBody>
       </p:sp>
       <p:pic>
         <p:nvPicPr>
@@ -13468,6 +13924,10 @@
             </a:outerShdw>
           </a:effectLst>
         </p:spPr>
+        <p:txBody>
+          <a:bodyPr/>
+          <a:p/>
+        </p:txBody>
       </p:sp>
       <p:sp>
         <p:nvSpPr>
@@ -13488,6 +13948,10 @@
           </a:solidFill>
           <a:ln/>
         </p:spPr>
+        <p:txBody>
+          <a:bodyPr/>
+          <a:p/>
+        </p:txBody>
       </p:sp>
       <p:pic>
         <p:nvPicPr>
@@ -13720,6 +14184,10 @@
           </a:solidFill>
           <a:ln/>
         </p:spPr>
+        <p:txBody>
+          <a:bodyPr/>
+          <a:p/>
+        </p:txBody>
       </p:sp>
       <p:pic>
         <p:nvPicPr>
@@ -13805,6 +14273,10 @@
           </a:solidFill>
           <a:ln/>
         </p:spPr>
+        <p:txBody>
+          <a:bodyPr/>
+          <a:p/>
+        </p:txBody>
       </p:sp>
       <p:sp>
         <p:nvSpPr>
@@ -13917,6 +14389,10 @@
             </a:outerShdw>
           </a:effectLst>
         </p:spPr>
+        <p:txBody>
+          <a:bodyPr/>
+          <a:p/>
+        </p:txBody>
       </p:sp>
       <p:sp>
         <p:nvSpPr>
@@ -14126,6 +14602,10 @@
           </a:solidFill>
           <a:ln/>
         </p:spPr>
+        <p:txBody>
+          <a:bodyPr/>
+          <a:p/>
+        </p:txBody>
       </p:sp>
       <p:pic>
         <p:nvPicPr>
@@ -14211,6 +14691,10 @@
           </a:solidFill>
           <a:ln/>
         </p:spPr>
+        <p:txBody>
+          <a:bodyPr/>
+          <a:p/>
+        </p:txBody>
       </p:sp>
       <p:sp>
         <p:nvSpPr>
@@ -14323,6 +14807,10 @@
             </a:outerShdw>
           </a:effectLst>
         </p:spPr>
+        <p:txBody>
+          <a:bodyPr/>
+          <a:p/>
+        </p:txBody>
       </p:sp>
       <p:sp>
         <p:nvSpPr>
